--- a/6-7 - Exploratory Data Analysis/Introduction to Exploratory Data Analysis.pptx
+++ b/6-7 - Exploratory Data Analysis/Introduction to Exploratory Data Analysis.pptx
@@ -3675,7 +3675,7 @@
           <a:p>
             <a:fld id="{75A99358-0554-3345-871D-48A6BABEE3E1}" type="datetimeFigureOut">
               <a:rPr lang="en-US" smtClean="0"/>
-              <a:t>12/5/25</a:t>
+              <a:t>12/8/2025</a:t>
             </a:fld>
             <a:endParaRPr lang="en-US"/>
           </a:p>
@@ -4202,7 +4202,7 @@
           <a:p>
             <a:fld id="{04BC266F-70C8-954B-9EC8-D842168CE9D2}" type="datetimeFigureOut">
               <a:rPr lang="en-US" smtClean="0"/>
-              <a:t>12/5/25</a:t>
+              <a:t>12/8/2025</a:t>
             </a:fld>
             <a:endParaRPr lang="en-US"/>
           </a:p>
@@ -6185,7 +6185,7 @@
           <a:p>
             <a:fld id="{04BC266F-70C8-954B-9EC8-D842168CE9D2}" type="datetimeFigureOut">
               <a:rPr lang="en-US" smtClean="0"/>
-              <a:t>12/5/25</a:t>
+              <a:t>12/8/2025</a:t>
             </a:fld>
             <a:endParaRPr lang="en-US"/>
           </a:p>
@@ -7860,7 +7860,7 @@
           <a:p>
             <a:fld id="{04BC266F-70C8-954B-9EC8-D842168CE9D2}" type="datetimeFigureOut">
               <a:rPr lang="en-US" smtClean="0"/>
-              <a:t>12/5/25</a:t>
+              <a:t>12/8/2025</a:t>
             </a:fld>
             <a:endParaRPr lang="en-US"/>
           </a:p>
@@ -8322,7 +8322,7 @@
           <a:p>
             <a:fld id="{04BC266F-70C8-954B-9EC8-D842168CE9D2}" type="datetimeFigureOut">
               <a:rPr lang="en-US" smtClean="0"/>
-              <a:t>12/5/25</a:t>
+              <a:t>12/8/2025</a:t>
             </a:fld>
             <a:endParaRPr lang="en-US"/>
           </a:p>
@@ -10043,7 +10043,7 @@
           <a:p>
             <a:fld id="{04BC266F-70C8-954B-9EC8-D842168CE9D2}" type="datetimeFigureOut">
               <a:rPr lang="en-US" smtClean="0"/>
-              <a:t>12/5/25</a:t>
+              <a:t>12/8/2025</a:t>
             </a:fld>
             <a:endParaRPr lang="en-US"/>
           </a:p>
@@ -13285,13 +13285,13 @@
   <p:clrMapOvr>
     <a:masterClrMapping/>
   </p:clrMapOvr>
-  <mc:AlternateContent xmlns:mc="http://schemas.openxmlformats.org/markup-compatibility/2006">
-    <mc:Choice xmlns:p159="http://schemas.microsoft.com/office/powerpoint/2015/09/main" Requires="p159">
+  <mc:AlternateContent xmlns:mc="http://schemas.openxmlformats.org/markup-compatibility/2006" xmlns:p159="http://schemas.microsoft.com/office/powerpoint/2015/09/main">
+    <mc:Choice Requires="p159">
       <p:transition xmlns:p14="http://schemas.microsoft.com/office/powerpoint/2010/main" spd="slow" p14:dur="2000">
         <p159:morph option="byObject"/>
       </p:transition>
     </mc:Choice>
-    <mc:Fallback>
+    <mc:Fallback xmlns="">
       <p:transition spd="slow">
         <p:fade/>
       </p:transition>
@@ -44540,39 +44540,6 @@
               <a:buFont typeface="Wingdings" pitchFamily="2" charset="2"/>
               <a:buChar char="§"/>
             </a:pPr>
-            <a:r>
-              <a:rPr lang="en-US" dirty="0">
-                <a:hlinkClick r:id="rId2"/>
-              </a:rPr>
-              <a:t>https://jisooleeworks.github.io/blog-site/2022/09/09/feature-scaling-min-max-z-score.html</a:t>
-            </a:r>
-            <a:endParaRPr lang="en-US" dirty="0"/>
-          </a:p>
-          <a:p>
-            <a:pPr>
-              <a:buFont typeface="Wingdings" pitchFamily="2" charset="2"/>
-              <a:buChar char="§"/>
-            </a:pPr>
-            <a:endParaRPr lang="en-US" dirty="0"/>
-          </a:p>
-          <a:p>
-            <a:pPr>
-              <a:buFont typeface="Wingdings" pitchFamily="2" charset="2"/>
-              <a:buChar char="§"/>
-            </a:pPr>
-            <a:r>
-              <a:rPr lang="en-US" dirty="0">
-                <a:hlinkClick r:id="rId3"/>
-              </a:rPr>
-              <a:t>https://vinaypaspula.substack.com/p/min-max-normalization-and-z-score-normalization-550988c2a990?utm_campaign=post&amp;utm_medium=web</a:t>
-            </a:r>
-            <a:endParaRPr lang="en-US" dirty="0"/>
-          </a:p>
-          <a:p>
-            <a:pPr>
-              <a:buFont typeface="Wingdings" pitchFamily="2" charset="2"/>
-              <a:buChar char="§"/>
-            </a:pPr>
             <a:endParaRPr lang="en-US" dirty="0"/>
           </a:p>
           <a:p>
